--- a/dist/초5/국어/문학문법매체/초5_국어_문학문법매체_01_인물·사건·배경.pptx
+++ b/dist/초5/국어/문학문법매체/초5_국어_문학문법매체_01_인물·사건·배경.pptx
@@ -121,13 +121,13 @@
   <p:extLst>
     <p:ext uri="{521415D9-36F7-43E2-AB2F-B90AF26B5E84}">
       <p14:sectionLst xmlns:p14="http://schemas.microsoft.com/office/powerpoint/2010/main">
-        <p14:section name="도입" id="{7f17c2db-5f66-214f-b088-d39ead4e446e}">
+        <p14:section name="도입" id="{c29d3d42-558b-3443-92dd-f15baca46a7e}">
           <p14:sldIdLst>
             <p14:sldId id="256"/>
             <p14:sldId id="257"/>
           </p14:sldIdLst>
         </p14:section>
-        <p14:section name="개념" id="{9dfaed74-fd07-0636-33fa-8508d503088c}">
+        <p14:section name="개념" id="{f25b331c-8f31-8744-5412-6819ada0b63e}">
           <p14:sldIdLst>
             <p14:sldId id="258"/>
             <p14:sldId id="259"/>
@@ -136,26 +136,26 @@
             <p14:sldId id="262"/>
           </p14:sldIdLst>
         </p14:section>
-        <p14:section name="연습" id="{8a1a1b95-c475-0419-6fdf-6e33758905d5}">
+        <p14:section name="연습" id="{e85bbc17-aecd-cfd9-01a7-53c50258dcdb}">
           <p14:sldIdLst>
             <p14:sldId id="263"/>
             <p14:sldId id="264"/>
             <p14:sldId id="265"/>
           </p14:sldIdLst>
         </p14:section>
-        <p14:section name="확인" id="{0e4eb845-109c-0d91-538d-213641f0ee03}">
+        <p14:section name="확인" id="{5b77aa00-7d03-950b-2c93-7fae1aca86ca}">
           <p14:sldIdLst>
             <p14:sldId id="266"/>
             <p14:sldId id="267"/>
             <p14:sldId id="268"/>
           </p14:sldIdLst>
         </p14:section>
-        <p14:section name="정리" id="{1ce3a2d4-8609-ff92-3b1c-5920613d9ce5}">
+        <p14:section name="정리" id="{a1a0f430-69e6-d794-1dca-a862772c57ad}">
           <p14:sldIdLst>
             <p14:sldId id="269"/>
           </p14:sldIdLst>
         </p14:section>
-        <p14:section name="보충" id="{1cda68d0-81c0-a354-131b-f11c9ea8c86a}">
+        <p14:section name="보충" id="{61398cee-596e-e0a5-89a3-0f88486f140e}">
           <p14:sldIdLst>
             <p14:sldId id="270"/>
           </p14:sldIdLst>
@@ -8111,7 +8111,7 @@
           </p:nvPr>
         </p:nvGraphicFramePr>
         <p:xfrm>
-          <a:off x="608076" y="1569720"/>
+          <a:off x="608076" y="1537716"/>
           <a:ext cx="10972800" cy="914400"/>
         </p:xfrm>
         <a:graphic>
@@ -8122,7 +8122,7 @@
                 <a:gridCol w="2194560"/>
                 <a:gridCol w="8778240"/>
               </a:tblGrid>
-              <a:tr h="472440">
+              <a:tr h="481584">
                 <a:tc>
                   <a:txBody>
                     <a:bodyPr/>
@@ -8260,7 +8260,7 @@
                   </a:tcPr>
                 </a:tc>
               </a:tr>
-              <a:tr h="472440">
+              <a:tr h="481584">
                 <a:tc>
                   <a:txBody>
                     <a:bodyPr/>
@@ -8398,7 +8398,7 @@
                   </a:tcPr>
                 </a:tc>
               </a:tr>
-              <a:tr h="472440">
+              <a:tr h="481584">
                 <a:tc>
                   <a:txBody>
                     <a:bodyPr/>
@@ -8536,7 +8536,7 @@
                   </a:tcPr>
                 </a:tc>
               </a:tr>
-              <a:tr h="472440">
+              <a:tr h="481584">
                 <a:tc>
                   <a:txBody>
                     <a:bodyPr/>
@@ -8674,7 +8674,7 @@
                   </a:tcPr>
                 </a:tc>
               </a:tr>
-              <a:tr h="472440">
+              <a:tr h="481584">
                 <a:tc>
                   <a:txBody>
                     <a:bodyPr/>
@@ -8812,7 +8812,7 @@
                   </a:tcPr>
                 </a:tc>
               </a:tr>
-              <a:tr h="472440">
+              <a:tr h="481584">
                 <a:tc>
                   <a:txBody>
                     <a:bodyPr/>
@@ -8950,7 +8950,7 @@
                   </a:tcPr>
                 </a:tc>
               </a:tr>
-              <a:tr h="472440">
+              <a:tr h="481584">
                 <a:tc>
                   <a:txBody>
                     <a:bodyPr/>
